--- a/curso_es/pptx/S88.pptx
+++ b/curso_es/pptx/S88.pptx
@@ -4506,7 +4506,7 @@
                 </a:solidFill>
                 <a:latin typeface="Nunito Sans"/>
               </a:rPr>
-              <a:t>En Aste Nagusia, alguien de la cuadrilla le pasa un vaper a Iker: «Venga, si lo hace todo el mundo». (Ejemplo inventado.)</a:t>
+              <a:t>En Aste Nagusia, alguien de la cuadrilla le pasa un vaper a un chico: «Venga, si lo hace todo el mundo». (Ejemplo inventado.)</a:t>
             </a:r>
           </a:p>
         </p:txBody>
@@ -4937,7 +4937,7 @@
                 </a:solidFill>
                 <a:latin typeface="Nunito Sans"/>
               </a:rPr>
-              <a:t>Chen juega tres horas al Fortnite los sábados con sus primos. Duerme bien, estudia y queda con la cuadrilla. Su tía dice: «Es adicto». (Ejemplo inventado.)</a:t>
+              <a:t>Un chico juega tres horas al Fortnite los sábados con sus primos. Duerme bien, estudia y queda con la cuadrilla. Su tía dice: «Es adicto». (Ejemplo inventado.)</a:t>
             </a:r>
           </a:p>
         </p:txBody>
@@ -5078,7 +5078,7 @@
                 </a:solidFill>
                 <a:latin typeface="Nunito Sans"/>
               </a:rPr>
-              <a:t>Chen elige cuándo jugar y no deja de lado el sueño, los estudios ni a la cuadrilla.</a:t>
+              <a:t>Ese chico elige cuándo jugar y no deja de lado el sueño, los estudios ni a la cuadrilla.</a:t>
             </a:r>
           </a:p>
           <a:p>
